--- a/Docker_AWS.pptx
+++ b/Docker_AWS.pptx
@@ -6896,7 +6896,19 @@
               <a:rPr lang="en-US" sz="1600" dirty="0">
                 <a:latin typeface="Consolas" panose="020B0609020204030204" pitchFamily="49" charset="0"/>
               </a:rPr>
-              <a:t>$ docker build -t python3 .</a:t>
+              <a:t>$ docker build –f </a:t>
+            </a:r>
+            <a:r>
+              <a:rPr lang="en-US" sz="1600" dirty="0" err="1">
+                <a:latin typeface="Consolas" panose="020B0609020204030204" pitchFamily="49" charset="0"/>
+              </a:rPr>
+              <a:t>Dockerfile</a:t>
+            </a:r>
+            <a:r>
+              <a:rPr lang="en-US" sz="1600" dirty="0">
+                <a:latin typeface="Consolas" panose="020B0609020204030204" pitchFamily="49" charset="0"/>
+              </a:rPr>
+              <a:t> -t python3 .</a:t>
             </a:r>
           </a:p>
           <a:p>
@@ -10182,21 +10194,7 @@
                 <a:latin typeface="Arial" panose="020B0604020202020204" pitchFamily="34" charset="0"/>
                 <a:cs typeface="Arial" panose="020B0604020202020204" pitchFamily="34" charset="0"/>
               </a:rPr>
-              <a:t>Build Docker Image (in </a:t>
-            </a:r>
-            <a:r>
-              <a:rPr lang="en-US" sz="2000" dirty="0" err="1">
-                <a:latin typeface="Arial" panose="020B0604020202020204" pitchFamily="34" charset="0"/>
-                <a:cs typeface="Arial" panose="020B0604020202020204" pitchFamily="34" charset="0"/>
-              </a:rPr>
-              <a:t>Dockerfile</a:t>
-            </a:r>
-            <a:r>
-              <a:rPr lang="en-US" sz="2000" dirty="0">
-                <a:latin typeface="Arial" panose="020B0604020202020204" pitchFamily="34" charset="0"/>
-                <a:cs typeface="Arial" panose="020B0604020202020204" pitchFamily="34" charset="0"/>
-              </a:rPr>
-              <a:t> directory)</a:t>
+              <a:t>Build Docker Image (in current directory)</a:t>
             </a:r>
           </a:p>
           <a:p>
@@ -10216,7 +10214,19 @@
               <a:rPr lang="en-US" sz="1600" dirty="0">
                 <a:latin typeface="Consolas" panose="020B0609020204030204" pitchFamily="49" charset="0"/>
               </a:rPr>
-              <a:t>    $ docker build –t python3 .</a:t>
+              <a:t>    $ docker build –f </a:t>
+            </a:r>
+            <a:r>
+              <a:rPr lang="en-US" sz="1600" dirty="0" err="1">
+                <a:latin typeface="Consolas" panose="020B0609020204030204" pitchFamily="49" charset="0"/>
+              </a:rPr>
+              <a:t>Dockerfile</a:t>
+            </a:r>
+            <a:r>
+              <a:rPr lang="en-US" sz="1600" dirty="0">
+                <a:latin typeface="Consolas" panose="020B0609020204030204" pitchFamily="49" charset="0"/>
+              </a:rPr>
+              <a:t> –t python3 .</a:t>
             </a:r>
           </a:p>
           <a:p>

--- a/Docker_AWS.pptx
+++ b/Docker_AWS.pptx
@@ -7724,7 +7724,7 @@
                   <a:srgbClr val="0070C0"/>
                 </a:solidFill>
               </a:rPr>
-              <a:t>Run Application</a:t>
+              <a:t>Run &amp; Deploy Application</a:t>
             </a:r>
             <a:endParaRPr lang="en-US" sz="2800" dirty="0">
               <a:solidFill>
